--- a/cursos/recursos/el-mapa-de-los-finales/01-rey-y-peon-contra-rey.pptx
+++ b/cursos/recursos/el-mapa-de-los-finales/01-rey-y-peon-contra-rey.pptx
@@ -6633,7 +6633,7 @@
                 </a:solidFill>
                 <a:latin typeface="Calibri"/>
               </a:rPr>
-              <a:t>Resolvé los tres diagramas clave de memoria: tapá la solución, decidí el resultado y después comprobá jugando contra el motor.</a:t>
+              <a:t>Resuelve los tres diagramas clave de memoria: tapa la solución, decide el resultado y después comprueba jugando contra el motor.</a:t>
             </a:r>
           </a:p>
           <a:p>
@@ -6704,7 +6704,7 @@
                 </a:solidFill>
                 <a:latin typeface="Calibri"/>
               </a:rPr>
-              <a:t>•  Recorré cada línea principal hasta entender el porqué de cada jugada.</a:t>
+              <a:t>•  Recorre cada línea principal hasta entender el porqué de cada jugada.</a:t>
             </a:r>
           </a:p>
           <a:p>
@@ -6720,7 +6720,7 @@
                 </a:solidFill>
                 <a:latin typeface="Calibri"/>
               </a:rPr>
-              <a:t>•  Practicá primero las posiciones clave, después las demás.</a:t>
+              <a:t>•  Practica primero las posiciones clave, después las demás.</a:t>
             </a:r>
           </a:p>
           <a:p>
@@ -6736,7 +6736,7 @@
                 </a:solidFill>
                 <a:latin typeface="Calibri"/>
               </a:rPr>
-              <a:t>•  Anotá las reglas de cada final con tus palabras.</a:t>
+              <a:t>•  Anota las reglas de cada final con tus palabras.</a:t>
             </a:r>
           </a:p>
         </p:txBody>
@@ -7109,7 +7109,7 @@
                 </a:solidFill>
                 <a:latin typeface="Calibri"/>
               </a:rPr>
-              <a:t>•  Si el peón todavía no ha movido, contá el cuadrado desde la casilla a la que llega con su primer salto doble.</a:t>
+              <a:t>•  Si el peón todavía no ha movido, cuenta el cuadrado desde la casilla a la que llega con su primer salto doble.</a:t>
             </a:r>
           </a:p>
           <a:p>
@@ -8175,7 +8175,7 @@
                 </a:solidFill>
                 <a:latin typeface="Calibri"/>
               </a:rPr>
-              <a:t>•  No conviene precipitar el avance a sexta: hacelo sólo con el camino despejado o cuando con ese avance ganás la oposición.</a:t>
+              <a:t>•  No conviene precipitar el avance a sexta: hazlo sólo con el camino despejado o cuando con ese avance ganas la oposición.</a:t>
             </a:r>
           </a:p>
           <a:p>
